--- a/docs/investor-materials/v1.5/aviation-ops/CTDI-pitch-deck-aviation-ops.pptx
+++ b/docs/investor-materials/v1.5/aviation-ops/CTDI-pitch-deck-aviation-ops.pptx
@@ -3492,7 +3492,7 @@
               <a:defRPr sz="1800"/>
             </a:pPr>
             <a:r>
-              <a:t>Business Source License 1.1 adopted 2026-08-24 — Licensor: CS Executive Services, LLC (same structure as MariaDB, HashiCorp, Sentry)</a:t>
+              <a:t>Business Source License 1.1 adopted 2026-08-24 — Licensor: [operator LLC], LLC (same structure as MariaDB, HashiCorp, Sentry)</a:t>
             </a:r>
           </a:p>
           <a:p>
@@ -3785,7 +3785,7 @@
               <a:defRPr sz="1800"/>
             </a:pPr>
             <a:r>
-              <a:t>Corey Sheldon — USMC veteran; owner, CS Executive Services, LLC, Arlington, VA — built CTDI to run his own dispatch operation and dispatches on it daily</a:t>
+              <a:t>the operator — USMC veteran; owner, [operator LLC], LLC, Arlington, VA — built CTDI to run his own dispatch operation and dispatches on it daily</a:t>
             </a:r>
           </a:p>
           <a:p>
@@ -3825,7 +3825,7 @@
               <a:defRPr sz="1800"/>
             </a:pPr>
             <a:r>
-              <a:t>Contact: info@csexecutiveservices.com</a:t>
+              <a:t>Contact: info@example.com</a:t>
             </a:r>
           </a:p>
         </p:txBody>
@@ -3904,7 +3904,7 @@
               <a:defRPr sz="1800"/>
             </a:pPr>
             <a:r>
-              <a:t>Built and operated by a single founder — CS Executive Services, LLC, Arlington, VA</a:t>
+              <a:t>Built and operated by a single founder — [operator LLC], LLC, Arlington, VA</a:t>
             </a:r>
           </a:p>
           <a:p>
